--- a/app/src/test/resources/fixtures/charts-native-arabic.pptx
+++ b/app/src/test/resources/fixtures/charts-native-arabic.pptx
@@ -1330,7 +1330,7 @@
           <c:showLeaderLines val="1"/>
         </c:dLbls>
         <c:firstSliceAng val="0"/>
-        <c:holeSize val="50"/>
+        <c:holeSize val="60"/>
       </c:doughnutChart>
     </c:plotArea>
     <c:legend>
